--- a/materials/OS-M3/OS-M3-S8-Simulations/OS-M3-S8-Simulations-slides.pptx
+++ b/materials/OS-M3/OS-M3-S8-Simulations/OS-M3-S8-Simulations-slides.pptx
@@ -7587,7 +7587,7 @@
             </a:pPr>
             <a:r>
               <a:rPr/>
-              <a:t>05/02/2026</a:t>
+              <a:t>08/02/2026</a:t>
             </a:r>
           </a:p>
         </p:txBody>

--- a/materials/OS-M3/OS-M3-S8-Simulations/OS-M3-S8-Simulations-slides.pptx
+++ b/materials/OS-M3/OS-M3-S8-Simulations/OS-M3-S8-Simulations-slides.pptx
@@ -7587,7 +7587,7 @@
             </a:pPr>
             <a:r>
               <a:rPr/>
-              <a:t>08/02/2026</a:t>
+              <a:t>11/02/2026</a:t>
             </a:r>
           </a:p>
         </p:txBody>

--- a/materials/OS-M3/OS-M3-S8-Simulations/OS-M3-S8-Simulations-slides.pptx
+++ b/materials/OS-M3/OS-M3-S8-Simulations/OS-M3-S8-Simulations-slides.pptx
@@ -7587,7 +7587,7 @@
             </a:pPr>
             <a:r>
               <a:rPr/>
-              <a:t>11/02/2026</a:t>
+              <a:t>12/02/2026</a:t>
             </a:r>
           </a:p>
         </p:txBody>

--- a/materials/OS-M3/OS-M3-S8-Simulations/OS-M3-S8-Simulations-slides.pptx
+++ b/materials/OS-M3/OS-M3-S8-Simulations/OS-M3-S8-Simulations-slides.pptx
@@ -7587,7 +7587,7 @@
             </a:pPr>
             <a:r>
               <a:rPr/>
-              <a:t>12/02/2026</a:t>
+              <a:t>13/02/2026</a:t>
             </a:r>
           </a:p>
         </p:txBody>

--- a/materials/OS-M3/OS-M3-S8-Simulations/OS-M3-S8-Simulations-slides.pptx
+++ b/materials/OS-M3/OS-M3-S8-Simulations/OS-M3-S8-Simulations-slides.pptx
@@ -7587,7 +7587,7 @@
             </a:pPr>
             <a:r>
               <a:rPr/>
-              <a:t>13/02/2026</a:t>
+              <a:t>15/02/2026</a:t>
             </a:r>
           </a:p>
         </p:txBody>

--- a/materials/OS-M3/OS-M3-S8-Simulations/OS-M3-S8-Simulations-slides.pptx
+++ b/materials/OS-M3/OS-M3-S8-Simulations/OS-M3-S8-Simulations-slides.pptx
@@ -7587,7 +7587,7 @@
             </a:pPr>
             <a:r>
               <a:rPr/>
-              <a:t>15/02/2026</a:t>
+              <a:t>18/02/2026</a:t>
             </a:r>
           </a:p>
         </p:txBody>

--- a/materials/OS-M3/OS-M3-S8-Simulations/OS-M3-S8-Simulations-slides.pptx
+++ b/materials/OS-M3/OS-M3-S8-Simulations/OS-M3-S8-Simulations-slides.pptx
@@ -565,7 +565,7 @@
             </a:pPr>
             <a:r>
               <a:rPr b="1"/>
-              <a:t>Speaker Notes</a:t>
+              <a:t>Presenter Notes</a:t>
             </a:r>
             <a:r>
               <a:rPr/>
@@ -755,7 +755,7 @@
             </a:pPr>
             <a:r>
               <a:rPr b="1"/>
-              <a:t>Speaker Notes</a:t>
+              <a:t>Presenter Notes</a:t>
             </a:r>
             <a:r>
               <a:rPr/>
@@ -841,7 +841,7 @@
             </a:pPr>
             <a:r>
               <a:rPr b="1"/>
-              <a:t>Speaker Notes</a:t>
+              <a:t>Presenter Notes</a:t>
             </a:r>
             <a:r>
               <a:rPr/>
@@ -977,7 +977,7 @@
             </a:pPr>
             <a:r>
               <a:rPr b="1"/>
-              <a:t>Speaker Notes</a:t>
+              <a:t>Presenter Notes</a:t>
             </a:r>
             <a:r>
               <a:rPr/>
@@ -1063,7 +1063,7 @@
             </a:pPr>
             <a:r>
               <a:rPr b="1"/>
-              <a:t>Speaker Notes</a:t>
+              <a:t>Presenter Notes</a:t>
             </a:r>
             <a:r>
               <a:rPr/>
@@ -1283,7 +1283,7 @@
             </a:pPr>
             <a:r>
               <a:rPr b="1"/>
-              <a:t>Speaker Notes</a:t>
+              <a:t>Presenter Notes</a:t>
             </a:r>
             <a:r>
               <a:rPr/>
@@ -1443,7 +1443,7 @@
             </a:pPr>
             <a:r>
               <a:rPr b="1"/>
-              <a:t>Speaker Notes</a:t>
+              <a:t>Presenter Notes</a:t>
             </a:r>
             <a:r>
               <a:rPr/>
@@ -1547,7 +1547,7 @@
             </a:pPr>
             <a:r>
               <a:rPr b="1"/>
-              <a:t>Speaker Notes</a:t>
+              <a:t>Presenter Notes</a:t>
             </a:r>
             <a:r>
               <a:rPr/>
@@ -1665,7 +1665,7 @@
             </a:pPr>
             <a:r>
               <a:rPr b="1"/>
-              <a:t>Speaker Notes</a:t>
+              <a:t>Presenter Notes</a:t>
             </a:r>
             <a:r>
               <a:rPr/>
@@ -1839,7 +1839,7 @@
             </a:pPr>
             <a:r>
               <a:rPr b="1"/>
-              <a:t>Speaker Notes</a:t>
+              <a:t>Presenter Notes</a:t>
             </a:r>
             <a:r>
               <a:rPr/>
@@ -1925,7 +1925,7 @@
             </a:pPr>
             <a:r>
               <a:rPr b="1"/>
-              <a:t>Speaker Notes</a:t>
+              <a:t>Presenter Notes</a:t>
             </a:r>
             <a:r>
               <a:rPr/>
@@ -1933,11 +1933,11 @@
             </a:r>
             <a:r>
               <a:rPr b="1"/>
-              <a:t>speaker notes</a:t>
-            </a:r>
-            <a:r>
-              <a:rPr/>
-              <a:t>. You will a script for the presenter for every slide. In presentation mode, your audience will not be able to see these speaker notes, they are only visible to the presenter.</a:t>
+              <a:t>presenter notes</a:t>
+            </a:r>
+            <a:r>
+              <a:rPr/>
+              <a:t>. You will a script for the presenter for every slide. In presentation mode, your audience will not be able to see these presenter notes, they are only visible to the presenter.</a:t>
             </a:r>
           </a:p>
           <a:p>
@@ -1963,7 +1963,7 @@
             </a:r>
             <a:r>
               <a:rPr/>
-              <a:t>. For some slides, there will be pedagogical tips, suggestions for activities and troubleshooting tips for issues your audience might run into. You can find these notes underneath the speaker notes.</a:t>
+              <a:t>. For some slides, there will be pedagogical tips, suggestions for activities and troubleshooting tips for issues your audience might run into. You can find these notes underneath the presenter notes.</a:t>
             </a:r>
           </a:p>
           <a:p>
@@ -2063,7 +2063,7 @@
             </a:pPr>
             <a:r>
               <a:rPr b="1"/>
-              <a:t>Speaker Notes</a:t>
+              <a:t>Presenter Notes</a:t>
             </a:r>
             <a:r>
               <a:rPr/>
@@ -2227,7 +2227,7 @@
             </a:pPr>
             <a:r>
               <a:rPr b="1"/>
-              <a:t>Speaker Notes:</a:t>
+              <a:t>Presenter Notes:</a:t>
             </a:r>
             <a:r>
               <a:rPr/>
@@ -2359,7 +2359,7 @@
             </a:pPr>
             <a:r>
               <a:rPr b="1"/>
-              <a:t>Speaker Notes</a:t>
+              <a:t>Presenter Notes</a:t>
             </a:r>
             <a:r>
               <a:rPr/>
@@ -2551,7 +2551,7 @@
             </a:pPr>
             <a:r>
               <a:rPr b="1"/>
-              <a:t>Speaker Notes</a:t>
+              <a:t>Presenter Notes</a:t>
             </a:r>
             <a:r>
               <a:rPr/>
@@ -2655,7 +2655,7 @@
             </a:pPr>
             <a:r>
               <a:rPr b="1"/>
-              <a:t>Speaker Notes</a:t>
+              <a:t>Presenter Notes</a:t>
             </a:r>
             <a:r>
               <a:rPr/>
@@ -2773,7 +2773,7 @@
             </a:pPr>
             <a:r>
               <a:rPr b="1"/>
-              <a:t>Speaker Notes</a:t>
+              <a:t>Presenter Notes</a:t>
             </a:r>
             <a:r>
               <a:rPr/>
@@ -2891,7 +2891,7 @@
             </a:pPr>
             <a:r>
               <a:rPr b="1"/>
-              <a:t>Speaker Notes</a:t>
+              <a:t>Presenter Notes</a:t>
             </a:r>
             <a:r>
               <a:rPr/>
@@ -3003,7 +3003,7 @@
             </a:pPr>
             <a:r>
               <a:rPr b="1"/>
-              <a:t>Speaker Notes</a:t>
+              <a:t>Presenter Notes</a:t>
             </a:r>
             <a:r>
               <a:rPr/>
@@ -3107,7 +3107,7 @@
             </a:pPr>
             <a:r>
               <a:rPr b="1"/>
-              <a:t>Speaker Notes</a:t>
+              <a:t>Presenter Notes</a:t>
             </a:r>
             <a:r>
               <a:rPr/>
@@ -3339,7 +3339,7 @@
             </a:pPr>
             <a:r>
               <a:rPr b="1"/>
-              <a:t>Speaker Notes</a:t>
+              <a:t>Presenter Notes</a:t>
             </a:r>
             <a:r>
               <a:rPr/>
@@ -3557,7 +3557,7 @@
             </a:pPr>
             <a:r>
               <a:rPr b="1"/>
-              <a:t>Speaker Notes</a:t>
+              <a:t>Presenter Notes</a:t>
             </a:r>
             <a:r>
               <a:rPr/>
@@ -3651,7 +3651,7 @@
             </a:pPr>
             <a:r>
               <a:rPr b="1"/>
-              <a:t>Speaker Notes</a:t>
+              <a:t>Presenter Notes</a:t>
             </a:r>
             <a:r>
               <a:rPr/>
@@ -3755,7 +3755,7 @@
             </a:pPr>
             <a:r>
               <a:rPr b="1"/>
-              <a:t>Speaker Notes</a:t>
+              <a:t>Presenter Notes</a:t>
             </a:r>
             <a:r>
               <a:rPr/>
@@ -3841,7 +3841,7 @@
             </a:pPr>
             <a:r>
               <a:rPr b="1"/>
-              <a:t>Speaker Notes</a:t>
+              <a:t>Presenter Notes</a:t>
             </a:r>
             <a:r>
               <a:rPr/>
@@ -4229,7 +4229,7 @@
             </a:pPr>
             <a:r>
               <a:rPr b="1"/>
-              <a:t>Speaker Notes</a:t>
+              <a:t>Presenter Notes</a:t>
             </a:r>
             <a:r>
               <a:rPr/>
@@ -4333,7 +4333,7 @@
             </a:pPr>
             <a:r>
               <a:rPr b="1"/>
-              <a:t>Speaker Notes</a:t>
+              <a:t>Presenter Notes</a:t>
             </a:r>
             <a:r>
               <a:rPr/>
@@ -4483,7 +4483,7 @@
             </a:pPr>
             <a:r>
               <a:rPr b="1"/>
-              <a:t>Speaker Notes</a:t>
+              <a:t>Presenter Notes</a:t>
             </a:r>
             <a:r>
               <a:rPr/>

--- a/materials/OS-M3/OS-M3-S8-Simulations/OS-M3-S8-Simulations-slides.pptx
+++ b/materials/OS-M3/OS-M3-S8-Simulations/OS-M3-S8-Simulations-slides.pptx
@@ -7587,7 +7587,7 @@
             </a:pPr>
             <a:r>
               <a:rPr/>
-              <a:t>18/02/2026</a:t>
+              <a:t>22/02/2026</a:t>
             </a:r>
           </a:p>
         </p:txBody>

--- a/materials/OS-M3/OS-M3-S8-Simulations/OS-M3-S8-Simulations-slides.pptx
+++ b/materials/OS-M3/OS-M3-S8-Simulations/OS-M3-S8-Simulations-slides.pptx
@@ -7587,7 +7587,7 @@
             </a:pPr>
             <a:r>
               <a:rPr/>
-              <a:t>22/02/2026</a:t>
+              <a:t>01/03/2026</a:t>
             </a:r>
           </a:p>
         </p:txBody>

--- a/materials/OS-M3/OS-M3-S8-Simulations/OS-M3-S8-Simulations-slides.pptx
+++ b/materials/OS-M3/OS-M3-S8-Simulations/OS-M3-S8-Simulations-slides.pptx
@@ -7587,7 +7587,7 @@
             </a:pPr>
             <a:r>
               <a:rPr/>
-              <a:t>01/03/2026</a:t>
+              <a:t>04/03/2026</a:t>
             </a:r>
           </a:p>
         </p:txBody>

--- a/materials/OS-M3/OS-M3-S8-Simulations/OS-M3-S8-Simulations-slides.pptx
+++ b/materials/OS-M3/OS-M3-S8-Simulations/OS-M3-S8-Simulations-slides.pptx
@@ -7587,7 +7587,7 @@
             </a:pPr>
             <a:r>
               <a:rPr/>
-              <a:t>04/03/2026</a:t>
+              <a:t>05/03/2026</a:t>
             </a:r>
           </a:p>
         </p:txBody>

--- a/materials/OS-M3/OS-M3-S8-Simulations/OS-M3-S8-Simulations-slides.pptx
+++ b/materials/OS-M3/OS-M3-S8-Simulations/OS-M3-S8-Simulations-slides.pptx
@@ -7799,12 +7799,8 @@
           <a:p>
             <a:pPr lvl="0"/>
             <a:r>
-              <a:rPr/>
-              <a:t>To </a:t>
-            </a:r>
-            <a:r>
-              <a:rPr b="1"/>
-              <a:t>understand</a:t>
+              <a:rPr b="1"/>
+              <a:t>Understand</a:t>
             </a:r>
             <a:r>
               <a:rPr/>
@@ -7814,12 +7810,8 @@
           <a:p>
             <a:pPr lvl="0"/>
             <a:r>
-              <a:rPr/>
-              <a:t>To </a:t>
-            </a:r>
-            <a:r>
-              <a:rPr b="1"/>
-              <a:t>explain</a:t>
+              <a:rPr b="1"/>
+              <a:t>Explain</a:t>
             </a:r>
             <a:r>
               <a:rPr/>
@@ -7829,12 +7821,8 @@
           <a:p>
             <a:pPr lvl="0"/>
             <a:r>
-              <a:rPr/>
-              <a:t>To </a:t>
-            </a:r>
-            <a:r>
-              <a:rPr b="1"/>
-              <a:t>summarize</a:t>
+              <a:rPr b="1"/>
+              <a:t>Summarize</a:t>
             </a:r>
             <a:r>
               <a:rPr/>
@@ -7844,12 +7832,8 @@
           <a:p>
             <a:pPr lvl="0"/>
             <a:r>
-              <a:rPr/>
-              <a:t>To </a:t>
-            </a:r>
-            <a:r>
-              <a:rPr b="1"/>
-              <a:t>perform</a:t>
+              <a:rPr b="1"/>
+              <a:t>Perform</a:t>
             </a:r>
             <a:r>
               <a:rPr/>
@@ -7859,12 +7843,8 @@
           <a:p>
             <a:pPr lvl="0"/>
             <a:r>
-              <a:rPr/>
-              <a:t>To </a:t>
-            </a:r>
-            <a:r>
-              <a:rPr b="1"/>
-              <a:t>understand</a:t>
+              <a:rPr b="1"/>
+              <a:t>Understand</a:t>
             </a:r>
             <a:r>
               <a:rPr/>
@@ -7874,12 +7854,8 @@
           <a:p>
             <a:pPr lvl="0"/>
             <a:r>
-              <a:rPr/>
-              <a:t>To </a:t>
-            </a:r>
-            <a:r>
-              <a:rPr b="1"/>
-              <a:t>explain</a:t>
+              <a:rPr b="1"/>
+              <a:t>Explain</a:t>
             </a:r>
             <a:r>
               <a:rPr/>
@@ -7889,12 +7865,8 @@
           <a:p>
             <a:pPr lvl="0"/>
             <a:r>
-              <a:rPr/>
-              <a:t>To </a:t>
-            </a:r>
-            <a:r>
-              <a:rPr b="1"/>
-              <a:t>summarize</a:t>
+              <a:rPr b="1"/>
+              <a:t>Summarize</a:t>
             </a:r>
             <a:r>
               <a:rPr/>
@@ -7905,7 +7877,7 @@
             <a:pPr lvl="0"/>
             <a:r>
               <a:rPr/>
-              <a:t>To successfully </a:t>
+              <a:t>Successfully </a:t>
             </a:r>
             <a:r>
               <a:rPr b="1"/>
@@ -9945,12 +9917,8 @@
           <a:p>
             <a:pPr lvl="0"/>
             <a:r>
-              <a:rPr/>
-              <a:t>To </a:t>
-            </a:r>
-            <a:r>
-              <a:rPr b="1"/>
-              <a:t>understand</a:t>
+              <a:rPr b="1"/>
+              <a:t>Understand</a:t>
             </a:r>
             <a:r>
               <a:rPr/>
@@ -9960,12 +9928,8 @@
           <a:p>
             <a:pPr lvl="0"/>
             <a:r>
-              <a:rPr/>
-              <a:t>To </a:t>
-            </a:r>
-            <a:r>
-              <a:rPr b="1"/>
-              <a:t>explain</a:t>
+              <a:rPr b="1"/>
+              <a:t>Explain</a:t>
             </a:r>
             <a:r>
               <a:rPr/>
@@ -9975,12 +9939,8 @@
           <a:p>
             <a:pPr lvl="0"/>
             <a:r>
-              <a:rPr/>
-              <a:t>To </a:t>
-            </a:r>
-            <a:r>
-              <a:rPr b="1"/>
-              <a:t>summarize</a:t>
+              <a:rPr b="1"/>
+              <a:t>Summarize</a:t>
             </a:r>
             <a:r>
               <a:rPr/>
@@ -9990,12 +9950,8 @@
           <a:p>
             <a:pPr lvl="0"/>
             <a:r>
-              <a:rPr/>
-              <a:t>To </a:t>
-            </a:r>
-            <a:r>
-              <a:rPr b="1"/>
-              <a:t>perform</a:t>
+              <a:rPr b="1"/>
+              <a:t>Perform</a:t>
             </a:r>
             <a:r>
               <a:rPr/>
@@ -11806,12 +11762,8 @@
           <a:p>
             <a:pPr lvl="0"/>
             <a:r>
-              <a:rPr/>
-              <a:t>To </a:t>
-            </a:r>
-            <a:r>
-              <a:rPr b="1"/>
-              <a:t>understand</a:t>
+              <a:rPr b="1"/>
+              <a:t>Understand</a:t>
             </a:r>
             <a:r>
               <a:rPr/>
@@ -11821,12 +11773,8 @@
           <a:p>
             <a:pPr lvl="0"/>
             <a:r>
-              <a:rPr/>
-              <a:t>To </a:t>
-            </a:r>
-            <a:r>
-              <a:rPr b="1"/>
-              <a:t>explain</a:t>
+              <a:rPr b="1"/>
+              <a:t>Explain</a:t>
             </a:r>
             <a:r>
               <a:rPr/>
@@ -11836,12 +11784,8 @@
           <a:p>
             <a:pPr lvl="0"/>
             <a:r>
-              <a:rPr/>
-              <a:t>To </a:t>
-            </a:r>
-            <a:r>
-              <a:rPr b="1"/>
-              <a:t>summarize</a:t>
+              <a:rPr b="1"/>
+              <a:t>Summarize</a:t>
             </a:r>
             <a:r>
               <a:rPr/>
@@ -11851,12 +11795,8 @@
           <a:p>
             <a:pPr lvl="0"/>
             <a:r>
-              <a:rPr/>
-              <a:t>To </a:t>
-            </a:r>
-            <a:r>
-              <a:rPr b="1"/>
-              <a:t>perform</a:t>
+              <a:rPr b="1"/>
+              <a:t>Perform</a:t>
             </a:r>
             <a:r>
               <a:rPr/>
@@ -11866,12 +11806,8 @@
           <a:p>
             <a:pPr lvl="0"/>
             <a:r>
-              <a:rPr/>
-              <a:t>To </a:t>
-            </a:r>
-            <a:r>
-              <a:rPr b="1"/>
-              <a:t>understand</a:t>
+              <a:rPr b="1"/>
+              <a:t>Understand</a:t>
             </a:r>
             <a:r>
               <a:rPr/>
@@ -11881,12 +11817,8 @@
           <a:p>
             <a:pPr lvl="0"/>
             <a:r>
-              <a:rPr/>
-              <a:t>To </a:t>
-            </a:r>
-            <a:r>
-              <a:rPr b="1"/>
-              <a:t>explain</a:t>
+              <a:rPr b="1"/>
+              <a:t>Explain</a:t>
             </a:r>
             <a:r>
               <a:rPr/>
@@ -11896,12 +11828,8 @@
           <a:p>
             <a:pPr lvl="0"/>
             <a:r>
-              <a:rPr/>
-              <a:t>To </a:t>
-            </a:r>
-            <a:r>
-              <a:rPr b="1"/>
-              <a:t>summarize</a:t>
+              <a:rPr b="1"/>
+              <a:t>Summarize</a:t>
             </a:r>
             <a:r>
               <a:rPr/>
@@ -11912,7 +11840,7 @@
             <a:pPr lvl="0"/>
             <a:r>
               <a:rPr/>
-              <a:t>To successfully </a:t>
+              <a:t>Successfully </a:t>
             </a:r>
             <a:r>
               <a:rPr b="1"/>

--- a/materials/OS-M3/OS-M3-S8-Simulations/OS-M3-S8-Simulations-slides.pptx
+++ b/materials/OS-M3/OS-M3-S8-Simulations/OS-M3-S8-Simulations-slides.pptx
@@ -7587,7 +7587,7 @@
             </a:pPr>
             <a:r>
               <a:rPr/>
-              <a:t>05/03/2026</a:t>
+              <a:t>08/03/2026</a:t>
             </a:r>
           </a:p>
         </p:txBody>

--- a/materials/OS-M3/OS-M3-S8-Simulations/OS-M3-S8-Simulations-slides.pptx
+++ b/materials/OS-M3/OS-M3-S8-Simulations/OS-M3-S8-Simulations-slides.pptx
@@ -7587,7 +7587,7 @@
             </a:pPr>
             <a:r>
               <a:rPr/>
-              <a:t>08/03/2026</a:t>
+              <a:t>11/03/2026</a:t>
             </a:r>
           </a:p>
         </p:txBody>

--- a/materials/OS-M3/OS-M3-S8-Simulations/OS-M3-S8-Simulations-slides.pptx
+++ b/materials/OS-M3/OS-M3-S8-Simulations/OS-M3-S8-Simulations-slides.pptx
@@ -7587,7 +7587,7 @@
             </a:pPr>
             <a:r>
               <a:rPr/>
-              <a:t>11/03/2026</a:t>
+              <a:t>12/03/2026</a:t>
             </a:r>
           </a:p>
         </p:txBody>

--- a/materials/OS-M3/OS-M3-S8-Simulations/OS-M3-S8-Simulations-slides.pptx
+++ b/materials/OS-M3/OS-M3-S8-Simulations/OS-M3-S8-Simulations-slides.pptx
@@ -7587,7 +7587,7 @@
             </a:pPr>
             <a:r>
               <a:rPr/>
-              <a:t>12/03/2026</a:t>
+              <a:t>15/03/2026</a:t>
             </a:r>
           </a:p>
         </p:txBody>

--- a/materials/OS-M3/OS-M3-S8-Simulations/OS-M3-S8-Simulations-slides.pptx
+++ b/materials/OS-M3/OS-M3-S8-Simulations/OS-M3-S8-Simulations-slides.pptx
@@ -7587,7 +7587,7 @@
             </a:pPr>
             <a:r>
               <a:rPr/>
-              <a:t>15/03/2026</a:t>
+              <a:t>19/03/2026</a:t>
             </a:r>
           </a:p>
         </p:txBody>

--- a/materials/OS-M3/OS-M3-S8-Simulations/OS-M3-S8-Simulations-slides.pptx
+++ b/materials/OS-M3/OS-M3-S8-Simulations/OS-M3-S8-Simulations-slides.pptx
@@ -7558,8 +7558,6 @@
             <a:pPr lvl="0" indent="0" marL="0">
               <a:buNone/>
             </a:pPr>
-            <a:br/>
-            <a:br/>
             <a:r>
               <a:rPr/>
               <a:t>Tejaswini Sharma</a:t>
@@ -7587,7 +7585,7 @@
             </a:pPr>
             <a:r>
               <a:rPr/>
-              <a:t>19/03/2026</a:t>
+              <a:t>22/03/2026</a:t>
             </a:r>
           </a:p>
         </p:txBody>

--- a/materials/OS-M3/OS-M3-S8-Simulations/OS-M3-S8-Simulations-slides.pptx
+++ b/materials/OS-M3/OS-M3-S8-Simulations/OS-M3-S8-Simulations-slides.pptx
@@ -7585,7 +7585,7 @@
             </a:pPr>
             <a:r>
               <a:rPr/>
-              <a:t>22/03/2026</a:t>
+              <a:t>29/03/2026</a:t>
             </a:r>
           </a:p>
         </p:txBody>

--- a/materials/OS-M3/OS-M3-S8-Simulations/OS-M3-S8-Simulations-slides.pptx
+++ b/materials/OS-M3/OS-M3-S8-Simulations/OS-M3-S8-Simulations-slides.pptx
@@ -7585,7 +7585,7 @@
             </a:pPr>
             <a:r>
               <a:rPr/>
-              <a:t>29/03/2026</a:t>
+              <a:t>01/04/2026</a:t>
             </a:r>
           </a:p>
         </p:txBody>

--- a/materials/OS-M3/OS-M3-S8-Simulations/OS-M3-S8-Simulations-slides.pptx
+++ b/materials/OS-M3/OS-M3-S8-Simulations/OS-M3-S8-Simulations-slides.pptx
@@ -7585,7 +7585,7 @@
             </a:pPr>
             <a:r>
               <a:rPr/>
-              <a:t>01/04/2026</a:t>
+              <a:t>05/04/2026</a:t>
             </a:r>
           </a:p>
         </p:txBody>

--- a/materials/OS-M3/OS-M3-S8-Simulations/OS-M3-S8-Simulations-slides.pptx
+++ b/materials/OS-M3/OS-M3-S8-Simulations/OS-M3-S8-Simulations-slides.pptx
@@ -7585,7 +7585,7 @@
             </a:pPr>
             <a:r>
               <a:rPr/>
-              <a:t>05/04/2026</a:t>
+              <a:t>08/04/2026</a:t>
             </a:r>
           </a:p>
         </p:txBody>

--- a/materials/OS-M3/OS-M3-S8-Simulations/OS-M3-S8-Simulations-slides.pptx
+++ b/materials/OS-M3/OS-M3-S8-Simulations/OS-M3-S8-Simulations-slides.pptx
@@ -7585,7 +7585,7 @@
             </a:pPr>
             <a:r>
               <a:rPr/>
-              <a:t>08/04/2026</a:t>
+              <a:t>10/04/2026</a:t>
             </a:r>
           </a:p>
         </p:txBody>

--- a/materials/OS-M3/OS-M3-S8-Simulations/OS-M3-S8-Simulations-slides.pptx
+++ b/materials/OS-M3/OS-M3-S8-Simulations/OS-M3-S8-Simulations-slides.pptx
@@ -7585,7 +7585,7 @@
             </a:pPr>
             <a:r>
               <a:rPr/>
-              <a:t>10/04/2026</a:t>
+              <a:t>12/04/2026</a:t>
             </a:r>
           </a:p>
         </p:txBody>

--- a/materials/OS-M3/OS-M3-S8-Simulations/OS-M3-S8-Simulations-slides.pptx
+++ b/materials/OS-M3/OS-M3-S8-Simulations/OS-M3-S8-Simulations-slides.pptx
@@ -7585,7 +7585,7 @@
             </a:pPr>
             <a:r>
               <a:rPr/>
-              <a:t>12/04/2026</a:t>
+              <a:t>15/04/2026</a:t>
             </a:r>
           </a:p>
         </p:txBody>

--- a/materials/OS-M3/OS-M3-S8-Simulations/OS-M3-S8-Simulations-slides.pptx
+++ b/materials/OS-M3/OS-M3-S8-Simulations/OS-M3-S8-Simulations-slides.pptx
@@ -7585,7 +7585,7 @@
             </a:pPr>
             <a:r>
               <a:rPr/>
-              <a:t>15/04/2026</a:t>
+              <a:t>19/04/2026</a:t>
             </a:r>
           </a:p>
         </p:txBody>

--- a/materials/OS-M3/OS-M3-S8-Simulations/OS-M3-S8-Simulations-slides.pptx
+++ b/materials/OS-M3/OS-M3-S8-Simulations/OS-M3-S8-Simulations-slides.pptx
@@ -7585,7 +7585,7 @@
             </a:pPr>
             <a:r>
               <a:rPr/>
-              <a:t>19/04/2026</a:t>
+              <a:t>26/04/2026</a:t>
             </a:r>
           </a:p>
         </p:txBody>

--- a/materials/OS-M3/OS-M3-S8-Simulations/OS-M3-S8-Simulations-slides.pptx
+++ b/materials/OS-M3/OS-M3-S8-Simulations/OS-M3-S8-Simulations-slides.pptx
@@ -7585,7 +7585,7 @@
             </a:pPr>
             <a:r>
               <a:rPr/>
-              <a:t>26/04/2026</a:t>
+              <a:t>29/04/2026</a:t>
             </a:r>
           </a:p>
         </p:txBody>

--- a/materials/OS-M3/OS-M3-S8-Simulations/OS-M3-S8-Simulations-slides.pptx
+++ b/materials/OS-M3/OS-M3-S8-Simulations/OS-M3-S8-Simulations-slides.pptx
@@ -7585,7 +7585,7 @@
             </a:pPr>
             <a:r>
               <a:rPr/>
-              <a:t>29/04/2026</a:t>
+              <a:t>03/05/2026</a:t>
             </a:r>
           </a:p>
         </p:txBody>

--- a/materials/OS-M3/OS-M3-S8-Simulations/OS-M3-S8-Simulations-slides.pptx
+++ b/materials/OS-M3/OS-M3-S8-Simulations/OS-M3-S8-Simulations-slides.pptx
@@ -7585,7 +7585,7 @@
             </a:pPr>
             <a:r>
               <a:rPr/>
-              <a:t>03/05/2026</a:t>
+              <a:t>06/05/2026</a:t>
             </a:r>
           </a:p>
         </p:txBody>

--- a/materials/OS-M3/OS-M3-S8-Simulations/OS-M3-S8-Simulations-slides.pptx
+++ b/materials/OS-M3/OS-M3-S8-Simulations/OS-M3-S8-Simulations-slides.pptx
@@ -7585,7 +7585,7 @@
             </a:pPr>
             <a:r>
               <a:rPr/>
-              <a:t>06/05/2026</a:t>
+              <a:t>12/05/2026</a:t>
             </a:r>
           </a:p>
         </p:txBody>

--- a/materials/OS-M3/OS-M3-S8-Simulations/OS-M3-S8-Simulations-slides.pptx
+++ b/materials/OS-M3/OS-M3-S8-Simulations/OS-M3-S8-Simulations-slides.pptx
@@ -7585,7 +7585,7 @@
             </a:pPr>
             <a:r>
               <a:rPr/>
-              <a:t>12/05/2026</a:t>
+              <a:t>17/05/2026</a:t>
             </a:r>
           </a:p>
         </p:txBody>

--- a/materials/OS-M3/OS-M3-S8-Simulations/OS-M3-S8-Simulations-slides.pptx
+++ b/materials/OS-M3/OS-M3-S8-Simulations/OS-M3-S8-Simulations-slides.pptx
@@ -7585,7 +7585,7 @@
             </a:pPr>
             <a:r>
               <a:rPr/>
-              <a:t>17/05/2026</a:t>
+              <a:t>20/05/2026</a:t>
             </a:r>
           </a:p>
         </p:txBody>

--- a/materials/OS-M3/OS-M3-S8-Simulations/OS-M3-S8-Simulations-slides.pptx
+++ b/materials/OS-M3/OS-M3-S8-Simulations/OS-M3-S8-Simulations-slides.pptx
@@ -7585,7 +7585,7 @@
             </a:pPr>
             <a:r>
               <a:rPr/>
-              <a:t>20/05/2026</a:t>
+              <a:t>25/05/2026</a:t>
             </a:r>
           </a:p>
         </p:txBody>

--- a/materials/OS-M3/OS-M3-S8-Simulations/OS-M3-S8-Simulations-slides.pptx
+++ b/materials/OS-M3/OS-M3-S8-Simulations/OS-M3-S8-Simulations-slides.pptx
@@ -7585,7 +7585,7 @@
             </a:pPr>
             <a:r>
               <a:rPr/>
-              <a:t>25/05/2026</a:t>
+              <a:t>01/06/2026</a:t>
             </a:r>
           </a:p>
         </p:txBody>

--- a/materials/OS-M3/OS-M3-S8-Simulations/OS-M3-S8-Simulations-slides.pptx
+++ b/materials/OS-M3/OS-M3-S8-Simulations/OS-M3-S8-Simulations-slides.pptx
@@ -7585,7 +7585,7 @@
             </a:pPr>
             <a:r>
               <a:rPr/>
-              <a:t>01/06/2026</a:t>
+              <a:t>08/06/2026</a:t>
             </a:r>
           </a:p>
         </p:txBody>

--- a/materials/OS-M3/OS-M3-S8-Simulations/OS-M3-S8-Simulations-slides.pptx
+++ b/materials/OS-M3/OS-M3-S8-Simulations/OS-M3-S8-Simulations-slides.pptx
@@ -7585,7 +7585,7 @@
             </a:pPr>
             <a:r>
               <a:rPr/>
-              <a:t>08/06/2026</a:t>
+              <a:t>09/06/2026</a:t>
             </a:r>
           </a:p>
         </p:txBody>

--- a/materials/OS-M3/OS-M3-S8-Simulations/OS-M3-S8-Simulations-slides.pptx
+++ b/materials/OS-M3/OS-M3-S8-Simulations/OS-M3-S8-Simulations-slides.pptx
@@ -7585,7 +7585,7 @@
             </a:pPr>
             <a:r>
               <a:rPr/>
-              <a:t>09/06/2026</a:t>
+              <a:t>15/06/2026</a:t>
             </a:r>
           </a:p>
         </p:txBody>

--- a/materials/OS-M3/OS-M3-S8-Simulations/OS-M3-S8-Simulations-slides.pptx
+++ b/materials/OS-M3/OS-M3-S8-Simulations/OS-M3-S8-Simulations-slides.pptx
@@ -7585,7 +7585,7 @@
             </a:pPr>
             <a:r>
               <a:rPr/>
-              <a:t>15/06/2026</a:t>
+              <a:t>22/06/2026</a:t>
             </a:r>
           </a:p>
         </p:txBody>

--- a/materials/OS-M3/OS-M3-S8-Simulations/OS-M3-S8-Simulations-slides.pptx
+++ b/materials/OS-M3/OS-M3-S8-Simulations/OS-M3-S8-Simulations-slides.pptx
@@ -7585,7 +7585,7 @@
             </a:pPr>
             <a:r>
               <a:rPr/>
-              <a:t>22/06/2026</a:t>
+              <a:t>29/06/2026</a:t>
             </a:r>
           </a:p>
         </p:txBody>

--- a/materials/OS-M3/OS-M3-S8-Simulations/OS-M3-S8-Simulations-slides.pptx
+++ b/materials/OS-M3/OS-M3-S8-Simulations/OS-M3-S8-Simulations-slides.pptx
@@ -7585,7 +7585,7 @@
             </a:pPr>
             <a:r>
               <a:rPr/>
-              <a:t>29/06/2026</a:t>
+              <a:t>06/07/2026</a:t>
             </a:r>
           </a:p>
         </p:txBody>

--- a/materials/OS-M3/OS-M3-S8-Simulations/OS-M3-S8-Simulations-slides.pptx
+++ b/materials/OS-M3/OS-M3-S8-Simulations/OS-M3-S8-Simulations-slides.pptx
@@ -7585,7 +7585,7 @@
             </a:pPr>
             <a:r>
               <a:rPr/>
-              <a:t>06/07/2026</a:t>
+              <a:t>12/07/2026</a:t>
             </a:r>
           </a:p>
         </p:txBody>

--- a/materials/OS-M3/OS-M3-S8-Simulations/OS-M3-S8-Simulations-slides.pptx
+++ b/materials/OS-M3/OS-M3-S8-Simulations/OS-M3-S8-Simulations-slides.pptx
@@ -7585,7 +7585,7 @@
             </a:pPr>
             <a:r>
               <a:rPr/>
-              <a:t>12/07/2026</a:t>
+              <a:t>17/07/2026</a:t>
             </a:r>
           </a:p>
         </p:txBody>

--- a/materials/OS-M3/OS-M3-S8-Simulations/OS-M3-S8-Simulations-slides.pptx
+++ b/materials/OS-M3/OS-M3-S8-Simulations/OS-M3-S8-Simulations-slides.pptx
@@ -7585,7 +7585,7 @@
             </a:pPr>
             <a:r>
               <a:rPr/>
-              <a:t>17/07/2026</a:t>
+              <a:t>20/07/2026</a:t>
             </a:r>
           </a:p>
         </p:txBody>

--- a/materials/OS-M3/OS-M3-S8-Simulations/OS-M3-S8-Simulations-slides.pptx
+++ b/materials/OS-M3/OS-M3-S8-Simulations/OS-M3-S8-Simulations-slides.pptx
@@ -7585,7 +7585,7 @@
             </a:pPr>
             <a:r>
               <a:rPr/>
-              <a:t>20/07/2026</a:t>
+              <a:t>22/07/2026</a:t>
             </a:r>
           </a:p>
         </p:txBody>

--- a/materials/OS-M3/OS-M3-S8-Simulations/OS-M3-S8-Simulations-slides.pptx
+++ b/materials/OS-M3/OS-M3-S8-Simulations/OS-M3-S8-Simulations-slides.pptx
@@ -7585,7 +7585,7 @@
             </a:pPr>
             <a:r>
               <a:rPr/>
-              <a:t>22/07/2026</a:t>
+              <a:t>23/07/2026</a:t>
             </a:r>
           </a:p>
         </p:txBody>

--- a/materials/OS-M3/OS-M3-S8-Simulations/OS-M3-S8-Simulations-slides.pptx
+++ b/materials/OS-M3/OS-M3-S8-Simulations/OS-M3-S8-Simulations-slides.pptx
@@ -7585,7 +7585,7 @@
             </a:pPr>
             <a:r>
               <a:rPr/>
-              <a:t>23/07/2026</a:t>
+              <a:t>27/07/2026</a:t>
             </a:r>
           </a:p>
         </p:txBody>

--- a/materials/OS-M3/OS-M3-S8-Simulations/OS-M3-S8-Simulations-slides.pptx
+++ b/materials/OS-M3/OS-M3-S8-Simulations/OS-M3-S8-Simulations-slides.pptx
@@ -7585,7 +7585,7 @@
             </a:pPr>
             <a:r>
               <a:rPr/>
-              <a:t>27/07/2026</a:t>
+              <a:t>03/08/2026</a:t>
             </a:r>
           </a:p>
         </p:txBody>

--- a/materials/OS-M3/OS-M3-S8-Simulations/OS-M3-S8-Simulations-slides.pptx
+++ b/materials/OS-M3/OS-M3-S8-Simulations/OS-M3-S8-Simulations-slides.pptx
@@ -7585,7 +7585,7 @@
             </a:pPr>
             <a:r>
               <a:rPr/>
-              <a:t>03/08/2026</a:t>
+              <a:t>04/08/2026</a:t>
             </a:r>
           </a:p>
         </p:txBody>

--- a/materials/OS-M3/OS-M3-S8-Simulations/OS-M3-S8-Simulations-slides.pptx
+++ b/materials/OS-M3/OS-M3-S8-Simulations/OS-M3-S8-Simulations-slides.pptx
@@ -7585,7 +7585,7 @@
             </a:pPr>
             <a:r>
               <a:rPr/>
-              <a:t>04/08/2026</a:t>
+              <a:t>09/08/2026</a:t>
             </a:r>
           </a:p>
         </p:txBody>

--- a/materials/OS-M3/OS-M3-S8-Simulations/OS-M3-S8-Simulations-slides.pptx
+++ b/materials/OS-M3/OS-M3-S8-Simulations/OS-M3-S8-Simulations-slides.pptx
@@ -7585,7 +7585,7 @@
             </a:pPr>
             <a:r>
               <a:rPr/>
-              <a:t>09/08/2026</a:t>
+              <a:t>10/08/2026</a:t>
             </a:r>
           </a:p>
         </p:txBody>

--- a/materials/OS-M3/OS-M3-S8-Simulations/OS-M3-S8-Simulations-slides.pptx
+++ b/materials/OS-M3/OS-M3-S8-Simulations/OS-M3-S8-Simulations-slides.pptx
@@ -7585,7 +7585,7 @@
             </a:pPr>
             <a:r>
               <a:rPr/>
-              <a:t>10/08/2026</a:t>
+              <a:t>12/08/2026</a:t>
             </a:r>
           </a:p>
         </p:txBody>

--- a/materials/OS-M3/OS-M3-S8-Simulations/OS-M3-S8-Simulations-slides.pptx
+++ b/materials/OS-M3/OS-M3-S8-Simulations/OS-M3-S8-Simulations-slides.pptx
@@ -7585,7 +7585,7 @@
             </a:pPr>
             <a:r>
               <a:rPr/>
-              <a:t>12/08/2026</a:t>
+              <a:t>13/08/2026</a:t>
             </a:r>
           </a:p>
         </p:txBody>

--- a/materials/OS-M3/OS-M3-S8-Simulations/OS-M3-S8-Simulations-slides.pptx
+++ b/materials/OS-M3/OS-M3-S8-Simulations/OS-M3-S8-Simulations-slides.pptx
@@ -7585,7 +7585,7 @@
             </a:pPr>
             <a:r>
               <a:rPr/>
-              <a:t>13/08/2026</a:t>
+              <a:t>16/08/2026</a:t>
             </a:r>
           </a:p>
         </p:txBody>

--- a/materials/OS-M3/OS-M3-S8-Simulations/OS-M3-S8-Simulations-slides.pptx
+++ b/materials/OS-M3/OS-M3-S8-Simulations/OS-M3-S8-Simulations-slides.pptx
@@ -7585,7 +7585,7 @@
             </a:pPr>
             <a:r>
               <a:rPr/>
-              <a:t>16/08/2026</a:t>
+              <a:t>23/08/2026</a:t>
             </a:r>
           </a:p>
         </p:txBody>

--- a/materials/OS-M3/OS-M3-S8-Simulations/OS-M3-S8-Simulations-slides.pptx
+++ b/materials/OS-M3/OS-M3-S8-Simulations/OS-M3-S8-Simulations-slides.pptx
@@ -7585,7 +7585,7 @@
             </a:pPr>
             <a:r>
               <a:rPr/>
-              <a:t>23/08/2026</a:t>
+              <a:t>31/08/2026</a:t>
             </a:r>
           </a:p>
         </p:txBody>
